--- a/knf/decks/d4p8.pptx
+++ b/knf/decks/d4p8.pptx
@@ -5488,7 +5488,7 @@
                 <a:ea typeface="Pretendard"/>
                 <a:cs typeface="Pretendard"/>
               </a:rPr>
-              <a:t>45분 뒤에는</a:t>
+              <a:t>50분 뒤에는</a:t>
             </a:r>
           </a:p>
         </p:txBody>

--- a/knf/decks/d4p8.pptx
+++ b/knf/decks/d4p8.pptx
@@ -3100,7 +3100,7 @@
       <p:grpSpPr/>
       <p:sp>
         <p:nvSpPr>
-          <p:cNvPr id="2" name="Oval 1"/>
+          <p:cNvPr id="2" name="deckgen:decor"/>
           <p:cNvSpPr/>
           <p:nvPr/>
         </p:nvSpPr>
@@ -3130,7 +3130,7 @@
       </p:sp>
       <p:sp>
         <p:nvSpPr>
-          <p:cNvPr id="3" name="Oval 2"/>
+          <p:cNvPr id="3" name="deckgen:decor"/>
           <p:cNvSpPr/>
           <p:nvPr/>
         </p:nvSpPr>
@@ -3160,7 +3160,7 @@
       </p:sp>
       <p:sp>
         <p:nvSpPr>
-          <p:cNvPr id="4" name="Oval 3"/>
+          <p:cNvPr id="4" name="deckgen:decor"/>
           <p:cNvSpPr/>
           <p:nvPr/>
         </p:nvSpPr>
@@ -3190,7 +3190,7 @@
       </p:sp>
       <p:sp>
         <p:nvSpPr>
-          <p:cNvPr id="5" name="Rectangle 4"/>
+          <p:cNvPr id="5" name="deckgen:decor"/>
           <p:cNvSpPr/>
           <p:nvPr/>
         </p:nvSpPr>
@@ -3220,7 +3220,7 @@
       </p:sp>
       <p:sp>
         <p:nvSpPr>
-          <p:cNvPr id="6" name="Oval 5"/>
+          <p:cNvPr id="6" name="deckgen:decor"/>
           <p:cNvSpPr/>
           <p:nvPr/>
         </p:nvSpPr>
@@ -3250,7 +3250,7 @@
       </p:sp>
       <p:sp>
         <p:nvSpPr>
-          <p:cNvPr id="7" name="Oval 6"/>
+          <p:cNvPr id="7" name="deckgen:decor"/>
           <p:cNvSpPr/>
           <p:nvPr/>
         </p:nvSpPr>
@@ -3280,7 +3280,7 @@
       </p:sp>
       <p:sp>
         <p:nvSpPr>
-          <p:cNvPr id="8" name="Oval 7"/>
+          <p:cNvPr id="8" name="deckgen:decor"/>
           <p:cNvSpPr/>
           <p:nvPr/>
         </p:nvSpPr>
@@ -3310,7 +3310,7 @@
       </p:sp>
       <p:sp>
         <p:nvSpPr>
-          <p:cNvPr id="9" name="Oval 8"/>
+          <p:cNvPr id="9" name="deckgen:decor"/>
           <p:cNvSpPr/>
           <p:nvPr/>
         </p:nvSpPr>
@@ -3340,7 +3340,7 @@
       </p:sp>
       <p:sp>
         <p:nvSpPr>
-          <p:cNvPr id="10" name="Rectangle 9"/>
+          <p:cNvPr id="10" name="deckgen:decor"/>
           <p:cNvSpPr/>
           <p:nvPr/>
         </p:nvSpPr>
@@ -3600,7 +3600,7 @@
       <p:grpSpPr/>
       <p:sp>
         <p:nvSpPr>
-          <p:cNvPr id="2" name="Oval 1"/>
+          <p:cNvPr id="2" name="deckgen:decor"/>
           <p:cNvSpPr/>
           <p:nvPr/>
         </p:nvSpPr>
@@ -3630,7 +3630,7 @@
       </p:sp>
       <p:sp>
         <p:nvSpPr>
-          <p:cNvPr id="3" name="Oval 2"/>
+          <p:cNvPr id="3" name="deckgen:decor"/>
           <p:cNvSpPr/>
           <p:nvPr/>
         </p:nvSpPr>
@@ -3660,7 +3660,7 @@
       </p:sp>
       <p:sp>
         <p:nvSpPr>
-          <p:cNvPr id="4" name="Oval 3"/>
+          <p:cNvPr id="4" name="deckgen:decor"/>
           <p:cNvSpPr/>
           <p:nvPr/>
         </p:nvSpPr>
@@ -4516,7 +4516,7 @@
       <p:grpSpPr/>
       <p:sp>
         <p:nvSpPr>
-          <p:cNvPr id="2" name="Oval 1"/>
+          <p:cNvPr id="2" name="deckgen:decor"/>
           <p:cNvSpPr/>
           <p:nvPr/>
         </p:nvSpPr>
@@ -4546,7 +4546,7 @@
       </p:sp>
       <p:sp>
         <p:nvSpPr>
-          <p:cNvPr id="3" name="Oval 2"/>
+          <p:cNvPr id="3" name="deckgen:decor"/>
           <p:cNvSpPr/>
           <p:nvPr/>
         </p:nvSpPr>
@@ -5323,7 +5323,7 @@
       <p:grpSpPr/>
       <p:sp>
         <p:nvSpPr>
-          <p:cNvPr id="2" name="Oval 1"/>
+          <p:cNvPr id="2" name="deckgen:decor"/>
           <p:cNvSpPr/>
           <p:nvPr/>
         </p:nvSpPr>
@@ -5353,7 +5353,7 @@
       </p:sp>
       <p:sp>
         <p:nvSpPr>
-          <p:cNvPr id="3" name="Oval 2"/>
+          <p:cNvPr id="3" name="deckgen:decor"/>
           <p:cNvSpPr/>
           <p:nvPr/>
         </p:nvSpPr>
@@ -5383,7 +5383,7 @@
       </p:sp>
       <p:sp>
         <p:nvSpPr>
-          <p:cNvPr id="4" name="Oval 3"/>
+          <p:cNvPr id="4" name="deckgen:decor"/>
           <p:cNvSpPr/>
           <p:nvPr/>
         </p:nvSpPr>
@@ -6168,7 +6168,7 @@
       <p:grpSpPr/>
       <p:sp>
         <p:nvSpPr>
-          <p:cNvPr id="2" name="Oval 1"/>
+          <p:cNvPr id="2" name="deckgen:decor"/>
           <p:cNvSpPr/>
           <p:nvPr/>
         </p:nvSpPr>
@@ -6198,7 +6198,7 @@
       </p:sp>
       <p:sp>
         <p:nvSpPr>
-          <p:cNvPr id="3" name="Oval 2"/>
+          <p:cNvPr id="3" name="deckgen:decor"/>
           <p:cNvSpPr/>
           <p:nvPr/>
         </p:nvSpPr>
@@ -6228,7 +6228,7 @@
       </p:sp>
       <p:sp>
         <p:nvSpPr>
-          <p:cNvPr id="4" name="Oval 3"/>
+          <p:cNvPr id="4" name="deckgen:decor"/>
           <p:cNvSpPr/>
           <p:nvPr/>
         </p:nvSpPr>
@@ -7838,7 +7838,7 @@
       <p:grpSpPr/>
       <p:sp>
         <p:nvSpPr>
-          <p:cNvPr id="2" name="Oval 1"/>
+          <p:cNvPr id="2" name="deckgen:decor"/>
           <p:cNvSpPr/>
           <p:nvPr/>
         </p:nvSpPr>
@@ -7868,7 +7868,7 @@
       </p:sp>
       <p:sp>
         <p:nvSpPr>
-          <p:cNvPr id="3" name="Oval 2"/>
+          <p:cNvPr id="3" name="deckgen:decor"/>
           <p:cNvSpPr/>
           <p:nvPr/>
         </p:nvSpPr>
@@ -7898,7 +7898,7 @@
       </p:sp>
       <p:sp>
         <p:nvSpPr>
-          <p:cNvPr id="4" name="Oval 3"/>
+          <p:cNvPr id="4" name="deckgen:decor"/>
           <p:cNvSpPr/>
           <p:nvPr/>
         </p:nvSpPr>
@@ -8899,7 +8899,7 @@
       <p:grpSpPr/>
       <p:sp>
         <p:nvSpPr>
-          <p:cNvPr id="2" name="Oval 1"/>
+          <p:cNvPr id="2" name="deckgen:decor"/>
           <p:cNvSpPr/>
           <p:nvPr/>
         </p:nvSpPr>
@@ -8929,7 +8929,7 @@
       </p:sp>
       <p:sp>
         <p:nvSpPr>
-          <p:cNvPr id="3" name="Oval 2"/>
+          <p:cNvPr id="3" name="deckgen:decor"/>
           <p:cNvSpPr/>
           <p:nvPr/>
         </p:nvSpPr>
@@ -8959,7 +8959,7 @@
       </p:sp>
       <p:sp>
         <p:nvSpPr>
-          <p:cNvPr id="4" name="Oval 3"/>
+          <p:cNvPr id="4" name="deckgen:decor"/>
           <p:cNvSpPr/>
           <p:nvPr/>
         </p:nvSpPr>
@@ -10273,7 +10273,7 @@
       <p:grpSpPr/>
       <p:sp>
         <p:nvSpPr>
-          <p:cNvPr id="2" name="Oval 1"/>
+          <p:cNvPr id="2" name="deckgen:decor"/>
           <p:cNvSpPr/>
           <p:nvPr/>
         </p:nvSpPr>
@@ -10303,7 +10303,7 @@
       </p:sp>
       <p:sp>
         <p:nvSpPr>
-          <p:cNvPr id="3" name="Oval 2"/>
+          <p:cNvPr id="3" name="deckgen:decor"/>
           <p:cNvSpPr/>
           <p:nvPr/>
         </p:nvSpPr>
@@ -10333,7 +10333,7 @@
       </p:sp>
       <p:sp>
         <p:nvSpPr>
-          <p:cNvPr id="4" name="Oval 3"/>
+          <p:cNvPr id="4" name="deckgen:decor"/>
           <p:cNvSpPr/>
           <p:nvPr/>
         </p:nvSpPr>
@@ -11466,7 +11466,7 @@
       <p:grpSpPr/>
       <p:sp>
         <p:nvSpPr>
-          <p:cNvPr id="2" name="Oval 1"/>
+          <p:cNvPr id="2" name="deckgen:decor"/>
           <p:cNvSpPr/>
           <p:nvPr/>
         </p:nvSpPr>
@@ -11496,7 +11496,7 @@
       </p:sp>
       <p:sp>
         <p:nvSpPr>
-          <p:cNvPr id="3" name="Oval 2"/>
+          <p:cNvPr id="3" name="deckgen:decor"/>
           <p:cNvSpPr/>
           <p:nvPr/>
         </p:nvSpPr>
@@ -11526,7 +11526,7 @@
       </p:sp>
       <p:sp>
         <p:nvSpPr>
-          <p:cNvPr id="4" name="Oval 3"/>
+          <p:cNvPr id="4" name="deckgen:decor"/>
           <p:cNvSpPr/>
           <p:nvPr/>
         </p:nvSpPr>
@@ -12680,7 +12680,7 @@
       <p:grpSpPr/>
       <p:sp>
         <p:nvSpPr>
-          <p:cNvPr id="2" name="Oval 1"/>
+          <p:cNvPr id="2" name="deckgen:decor"/>
           <p:cNvSpPr/>
           <p:nvPr/>
         </p:nvSpPr>
@@ -12710,7 +12710,7 @@
       </p:sp>
       <p:sp>
         <p:nvSpPr>
-          <p:cNvPr id="3" name="Oval 2"/>
+          <p:cNvPr id="3" name="deckgen:decor"/>
           <p:cNvSpPr/>
           <p:nvPr/>
         </p:nvSpPr>
@@ -12740,7 +12740,7 @@
       </p:sp>
       <p:sp>
         <p:nvSpPr>
-          <p:cNvPr id="4" name="Oval 3"/>
+          <p:cNvPr id="4" name="deckgen:decor"/>
           <p:cNvSpPr/>
           <p:nvPr/>
         </p:nvSpPr>
@@ -13671,7 +13671,7 @@
       <p:grpSpPr/>
       <p:sp>
         <p:nvSpPr>
-          <p:cNvPr id="2" name="Oval 1"/>
+          <p:cNvPr id="2" name="deckgen:decor"/>
           <p:cNvSpPr/>
           <p:nvPr/>
         </p:nvSpPr>
@@ -13701,7 +13701,7 @@
       </p:sp>
       <p:sp>
         <p:nvSpPr>
-          <p:cNvPr id="3" name="Oval 2"/>
+          <p:cNvPr id="3" name="deckgen:decor"/>
           <p:cNvSpPr/>
           <p:nvPr/>
         </p:nvSpPr>
@@ -13731,7 +13731,7 @@
       </p:sp>
       <p:sp>
         <p:nvSpPr>
-          <p:cNvPr id="4" name="Oval 3"/>
+          <p:cNvPr id="4" name="deckgen:decor"/>
           <p:cNvSpPr/>
           <p:nvPr/>
         </p:nvSpPr>
@@ -13937,7 +13937,7 @@
       </p:sp>
       <p:sp>
         <p:nvSpPr>
-          <p:cNvPr id="10" name="TextBox 9"/>
+          <p:cNvPr id="10" name="deckgen:ornament"/>
           <p:cNvSpPr txBox="1"/>
           <p:nvPr/>
         </p:nvSpPr>
@@ -14122,7 +14122,7 @@
       </p:sp>
       <p:sp>
         <p:nvSpPr>
-          <p:cNvPr id="14" name="TextBox 13"/>
+          <p:cNvPr id="14" name="deckgen:ornament"/>
           <p:cNvSpPr txBox="1"/>
           <p:nvPr/>
         </p:nvSpPr>
@@ -14307,7 +14307,7 @@
       </p:sp>
       <p:sp>
         <p:nvSpPr>
-          <p:cNvPr id="18" name="TextBox 17"/>
+          <p:cNvPr id="18" name="deckgen:ornament"/>
           <p:cNvSpPr txBox="1"/>
           <p:nvPr/>
         </p:nvSpPr>
@@ -14492,7 +14492,7 @@
       </p:sp>
       <p:sp>
         <p:nvSpPr>
-          <p:cNvPr id="22" name="TextBox 21"/>
+          <p:cNvPr id="22" name="deckgen:ornament"/>
           <p:cNvSpPr txBox="1"/>
           <p:nvPr/>
         </p:nvSpPr>
